--- a/backend/uploads/templates/0845f871-0a64-42a1-97f4-7c0a12644b99/template.pptx
+++ b/backend/uploads/templates/0845f871-0a64-42a1-97f4-7c0a12644b99/template.pptx
@@ -5,12 +5,11 @@
     <p:sldMasterId id="2147483648" r:id="rId1"/>
   </p:sldMasterIdLst>
   <p:notesMasterIdLst>
-    <p:notesMasterId r:id="rId5"/>
+    <p:notesMasterId r:id="rId4"/>
   </p:notesMasterIdLst>
   <p:sldIdLst>
     <p:sldId id="256" r:id="rId2"/>
-    <p:sldId id="709" r:id="rId3"/>
-    <p:sldId id="708" r:id="rId4"/>
+    <p:sldId id="708" r:id="rId3"/>
   </p:sldIdLst>
   <p:sldSz cx="12192000" cy="6858000"/>
   <p:notesSz cx="6858000" cy="9144000"/>
@@ -123,6 +122,42 @@
     <p1510:client id="{6C33CFFD-DCE3-4C35-836E-CE7D5D471142}" v="3" dt="2026-07-01T23:50:15.641"/>
   </p1510:revLst>
 </p1510:revInfo>
+</file>
+
+<file path=ppt/changesInfos/changesInfo1.xml><?xml version="1.0" encoding="utf-8"?>
+<pc:chgInfo xmlns:a="http://schemas.openxmlformats.org/drawingml/2006/main" xmlns:r="http://schemas.openxmlformats.org/officeDocument/2006/relationships" xmlns:ac="http://schemas.microsoft.com/office/drawing/2013/main/command" xmlns:pc="http://schemas.microsoft.com/office/powerpoint/2013/main/command">
+  <pc:docChgLst>
+    <pc:chgData name="GABRIEL ESTEBAN DE ICAZA DAVILA" userId="1cebe823-2a0b-4e0b-9d02-0c9f2131acb4" providerId="ADAL" clId="{AD3E325F-1260-4BA1-AB31-1F7E6BAADDA3}"/>
+    <pc:docChg chg="custSel delSld modSld">
+      <pc:chgData name="GABRIEL ESTEBAN DE ICAZA DAVILA" userId="1cebe823-2a0b-4e0b-9d02-0c9f2131acb4" providerId="ADAL" clId="{AD3E325F-1260-4BA1-AB31-1F7E6BAADDA3}" dt="2026-07-02T23:19:41.068" v="1" actId="478"/>
+      <pc:docMkLst>
+        <pc:docMk/>
+      </pc:docMkLst>
+      <pc:sldChg chg="delSp mod">
+        <pc:chgData name="GABRIEL ESTEBAN DE ICAZA DAVILA" userId="1cebe823-2a0b-4e0b-9d02-0c9f2131acb4" providerId="ADAL" clId="{AD3E325F-1260-4BA1-AB31-1F7E6BAADDA3}" dt="2026-07-02T23:19:41.068" v="1" actId="478"/>
+        <pc:sldMkLst>
+          <pc:docMk/>
+          <pc:sldMk cId="2266760583" sldId="708"/>
+        </pc:sldMkLst>
+        <pc:graphicFrameChg chg="del">
+          <ac:chgData name="GABRIEL ESTEBAN DE ICAZA DAVILA" userId="1cebe823-2a0b-4e0b-9d02-0c9f2131acb4" providerId="ADAL" clId="{AD3E325F-1260-4BA1-AB31-1F7E6BAADDA3}" dt="2026-07-02T23:19:41.068" v="1" actId="478"/>
+          <ac:graphicFrameMkLst>
+            <pc:docMk/>
+            <pc:sldMk cId="2266760583" sldId="708"/>
+            <ac:graphicFrameMk id="12" creationId="{6D7DACC0-0EF0-0342-1C74-8099DD53CD7E}"/>
+          </ac:graphicFrameMkLst>
+        </pc:graphicFrameChg>
+      </pc:sldChg>
+      <pc:sldChg chg="del">
+        <pc:chgData name="GABRIEL ESTEBAN DE ICAZA DAVILA" userId="1cebe823-2a0b-4e0b-9d02-0c9f2131acb4" providerId="ADAL" clId="{AD3E325F-1260-4BA1-AB31-1F7E6BAADDA3}" dt="2026-07-02T23:13:31.479" v="0" actId="47"/>
+        <pc:sldMkLst>
+          <pc:docMk/>
+          <pc:sldMk cId="512499782" sldId="709"/>
+        </pc:sldMkLst>
+      </pc:sldChg>
+    </pc:docChg>
+  </pc:docChgLst>
+</pc:chgInfo>
 </file>
 
 <file path=ppt/notesMasters/notesMaster1.xml><?xml version="1.0" encoding="utf-8"?>
@@ -4041,36 +4076,6 @@
           <a:chExt cx="0" cy="0"/>
         </a:xfrm>
       </p:grpSpPr>
-    </p:spTree>
-    <p:extLst>
-      <p:ext uri="{BB962C8B-B14F-4D97-AF65-F5344CB8AC3E}">
-        <p14:creationId xmlns:p14="http://schemas.microsoft.com/office/powerpoint/2010/main" val="512499782"/>
-      </p:ext>
-    </p:extLst>
-  </p:cSld>
-  <p:clrMapOvr>
-    <a:masterClrMapping/>
-  </p:clrMapOvr>
-</p:sld>
-</file>
-
-<file path=ppt/slides/slide3.xml><?xml version="1.0" encoding="utf-8"?>
-<p:sld xmlns:a="http://schemas.openxmlformats.org/drawingml/2006/main" xmlns:r="http://schemas.openxmlformats.org/officeDocument/2006/relationships" xmlns:p="http://schemas.openxmlformats.org/presentationml/2006/main">
-  <p:cSld>
-    <p:spTree>
-      <p:nvGrpSpPr>
-        <p:cNvPr id="1" name=""/>
-        <p:cNvGrpSpPr/>
-        <p:nvPr/>
-      </p:nvGrpSpPr>
-      <p:grpSpPr>
-        <a:xfrm>
-          <a:off x="0" y="0"/>
-          <a:ext cx="0" cy="0"/>
-          <a:chOff x="0" y="0"/>
-          <a:chExt cx="0" cy="0"/>
-        </a:xfrm>
-      </p:grpSpPr>
       <p:grpSp>
         <p:nvGrpSpPr>
           <p:cNvPr id="2" name="Google Shape;937;g3d77ff31867_0_19">
@@ -4357,174 +4362,6 @@
           </a:ln>
         </p:spPr>
       </p:pic>
-      <p:graphicFrame>
-        <p:nvGraphicFramePr>
-          <p:cNvPr id="12" name="Google Shape;945;g3d77ff31867_0_19">
-            <a:extLst>
-              <a:ext uri="{FF2B5EF4-FFF2-40B4-BE49-F238E27FC236}">
-                <a16:creationId xmlns:a16="http://schemas.microsoft.com/office/drawing/2014/main" id="{6D7DACC0-0EF0-0342-1C74-8099DD53CD7E}"/>
-              </a:ext>
-            </a:extLst>
-          </p:cNvPr>
-          <p:cNvGraphicFramePr/>
-          <p:nvPr>
-            <p:extLst>
-              <p:ext uri="{D42A27DB-BD31-4B8C-83A1-F6EECF244321}">
-                <p14:modId xmlns:p14="http://schemas.microsoft.com/office/powerpoint/2010/main" val="1148685900"/>
-              </p:ext>
-            </p:extLst>
-          </p:nvPr>
-        </p:nvGraphicFramePr>
-        <p:xfrm>
-          <a:off x="452425" y="1282888"/>
-          <a:ext cx="11287125" cy="4899645"/>
-        </p:xfrm>
-        <a:graphic>
-          <a:graphicData uri="http://schemas.openxmlformats.org/drawingml/2006/table">
-            <a:tbl>
-              <a:tblPr>
-                <a:noFill/>
-              </a:tblPr>
-              <a:tblGrid>
-                <a:gridCol w="11287125">
-                  <a:extLst>
-                    <a:ext uri="{9D8B030D-6E8A-4147-A177-3AD203B41FA5}">
-                      <a16:colId xmlns:a16="http://schemas.microsoft.com/office/drawing/2014/main" val="20000"/>
-                    </a:ext>
-                  </a:extLst>
-                </a:gridCol>
-              </a:tblGrid>
-              <a:tr h="266700">
-                <a:tc>
-                  <a:txBody>
-                    <a:bodyPr/>
-                    <a:lstStyle/>
-                    <a:p>
-                      <a:endParaRPr lang="es-MX" dirty="0"/>
-                    </a:p>
-                  </a:txBody>
-                  <a:tcPr marL="9525" marR="9525" marT="9525" marB="91425" anchor="ctr">
-                    <a:lnL w="9525" cap="flat" cmpd="sng" algn="ctr">
-                      <a:solidFill>
-                        <a:schemeClr val="bg1">
-                          <a:lumMod val="50000"/>
-                        </a:schemeClr>
-                      </a:solidFill>
-                      <a:prstDash val="solid"/>
-                      <a:round/>
-                      <a:headEnd type="none" w="med" len="med"/>
-                      <a:tailEnd type="none" w="med" len="med"/>
-                    </a:lnL>
-                    <a:lnR w="9525" cap="flat" cmpd="sng" algn="ctr">
-                      <a:solidFill>
-                        <a:schemeClr val="bg1">
-                          <a:lumMod val="50000"/>
-                        </a:schemeClr>
-                      </a:solidFill>
-                      <a:prstDash val="solid"/>
-                      <a:round/>
-                      <a:headEnd type="none" w="med" len="med"/>
-                      <a:tailEnd type="none" w="med" len="med"/>
-                    </a:lnR>
-                    <a:lnT w="9525" cap="flat" cmpd="sng" algn="ctr">
-                      <a:solidFill>
-                        <a:schemeClr val="bg1">
-                          <a:lumMod val="50000"/>
-                        </a:schemeClr>
-                      </a:solidFill>
-                      <a:prstDash val="solid"/>
-                      <a:round/>
-                      <a:headEnd type="none" w="med" len="med"/>
-                      <a:tailEnd type="none" w="med" len="med"/>
-                    </a:lnT>
-                    <a:lnB w="9525" cap="flat" cmpd="sng" algn="ctr">
-                      <a:solidFill>
-                        <a:schemeClr val="bg1">
-                          <a:lumMod val="50000"/>
-                        </a:schemeClr>
-                      </a:solidFill>
-                      <a:prstDash val="solid"/>
-                      <a:round/>
-                      <a:headEnd type="none" w="med" len="med"/>
-                      <a:tailEnd type="none" w="med" len="med"/>
-                    </a:lnB>
-                    <a:solidFill>
-                      <a:srgbClr val="9D2148"/>
-                    </a:solidFill>
-                  </a:tcPr>
-                </a:tc>
-                <a:extLst>
-                  <a:ext uri="{0D108BD9-81ED-4DB2-BD59-A6C34878D82A}">
-                    <a16:rowId xmlns:a16="http://schemas.microsoft.com/office/drawing/2014/main" val="10000"/>
-                  </a:ext>
-                </a:extLst>
-              </a:tr>
-              <a:tr h="4524375">
-                <a:tc>
-                  <a:txBody>
-                    <a:bodyPr/>
-                    <a:lstStyle/>
-                    <a:p>
-                      <a:endParaRPr lang="es-MX" dirty="0"/>
-                    </a:p>
-                  </a:txBody>
-                  <a:tcPr marL="9525" marR="9525" marT="9525" marB="91425" anchor="ctr">
-                    <a:lnL w="9525" cap="flat" cmpd="sng" algn="ctr">
-                      <a:solidFill>
-                        <a:schemeClr val="bg1">
-                          <a:lumMod val="50000"/>
-                        </a:schemeClr>
-                      </a:solidFill>
-                      <a:prstDash val="solid"/>
-                      <a:round/>
-                      <a:headEnd type="none" w="med" len="med"/>
-                      <a:tailEnd type="none" w="med" len="med"/>
-                    </a:lnL>
-                    <a:lnR w="9525" cap="flat" cmpd="sng" algn="ctr">
-                      <a:solidFill>
-                        <a:schemeClr val="bg1">
-                          <a:lumMod val="50000"/>
-                        </a:schemeClr>
-                      </a:solidFill>
-                      <a:prstDash val="solid"/>
-                      <a:round/>
-                      <a:headEnd type="none" w="med" len="med"/>
-                      <a:tailEnd type="none" w="med" len="med"/>
-                    </a:lnR>
-                    <a:lnT w="9525" cap="flat" cmpd="sng" algn="ctr">
-                      <a:solidFill>
-                        <a:schemeClr val="bg1">
-                          <a:lumMod val="50000"/>
-                        </a:schemeClr>
-                      </a:solidFill>
-                      <a:prstDash val="solid"/>
-                      <a:round/>
-                      <a:headEnd type="none" w="med" len="med"/>
-                      <a:tailEnd type="none" w="med" len="med"/>
-                    </a:lnT>
-                    <a:lnB w="9525" cap="flat" cmpd="sng" algn="ctr">
-                      <a:solidFill>
-                        <a:schemeClr val="bg1">
-                          <a:lumMod val="50000"/>
-                        </a:schemeClr>
-                      </a:solidFill>
-                      <a:prstDash val="solid"/>
-                      <a:round/>
-                      <a:headEnd type="none" w="med" len="med"/>
-                      <a:tailEnd type="none" w="med" len="med"/>
-                    </a:lnB>
-                  </a:tcPr>
-                </a:tc>
-                <a:extLst>
-                  <a:ext uri="{0D108BD9-81ED-4DB2-BD59-A6C34878D82A}">
-                    <a16:rowId xmlns:a16="http://schemas.microsoft.com/office/drawing/2014/main" val="10001"/>
-                  </a:ext>
-                </a:extLst>
-              </a:tr>
-            </a:tbl>
-          </a:graphicData>
-        </a:graphic>
-      </p:graphicFrame>
       <p:sp>
         <p:nvSpPr>
           <p:cNvPr id="22" name="Google Shape;943;g3d77ff31867_0_19">

--- a/backend/uploads/templates/0845f871-0a64-42a1-97f4-7c0a12644b99/template.pptx
+++ b/backend/uploads/templates/0845f871-0a64-42a1-97f4-7c0a12644b99/template.pptx
@@ -116,43 +116,43 @@
 </p:presentation>
 </file>
 
-<file path=ppt/revisionInfo.xml><?xml version="1.0" encoding="utf-8"?>
-<p1510:revInfo xmlns:a="http://schemas.openxmlformats.org/drawingml/2006/main" xmlns:r="http://schemas.openxmlformats.org/officeDocument/2006/relationships" xmlns:p1510="http://schemas.microsoft.com/office/powerpoint/2015/10/main">
-  <p1510:revLst>
-    <p1510:client id="{6C33CFFD-DCE3-4C35-836E-CE7D5D471142}" v="3" dt="2026-07-01T23:50:15.641"/>
-  </p1510:revLst>
-</p1510:revInfo>
-</file>
-
 <file path=ppt/changesInfos/changesInfo1.xml><?xml version="1.0" encoding="utf-8"?>
 <pc:chgInfo xmlns:a="http://schemas.openxmlformats.org/drawingml/2006/main" xmlns:r="http://schemas.openxmlformats.org/officeDocument/2006/relationships" xmlns:ac="http://schemas.microsoft.com/office/drawing/2013/main/command" xmlns:pc="http://schemas.microsoft.com/office/powerpoint/2013/main/command">
   <pc:docChgLst>
     <pc:chgData name="GABRIEL ESTEBAN DE ICAZA DAVILA" userId="1cebe823-2a0b-4e0b-9d02-0c9f2131acb4" providerId="ADAL" clId="{AD3E325F-1260-4BA1-AB31-1F7E6BAADDA3}"/>
     <pc:docChg chg="custSel delSld modSld">
-      <pc:chgData name="GABRIEL ESTEBAN DE ICAZA DAVILA" userId="1cebe823-2a0b-4e0b-9d02-0c9f2131acb4" providerId="ADAL" clId="{AD3E325F-1260-4BA1-AB31-1F7E6BAADDA3}" dt="2026-07-02T23:19:41.068" v="1" actId="478"/>
+      <pc:chgData name="GABRIEL ESTEBAN DE ICAZA DAVILA" userId="1cebe823-2a0b-4e0b-9d02-0c9f2131acb4" providerId="ADAL" clId="{AD3E325F-1260-4BA1-AB31-1F7E6BAADDA3}" dt="2026-07-04T17:07:06.861" v="8"/>
       <pc:docMkLst>
         <pc:docMk/>
       </pc:docMkLst>
+      <pc:sldChg chg="delSp modSp mod">
+        <pc:chgData name="GABRIEL ESTEBAN DE ICAZA DAVILA" userId="1cebe823-2a0b-4e0b-9d02-0c9f2131acb4" providerId="ADAL" clId="{AD3E325F-1260-4BA1-AB31-1F7E6BAADDA3}" dt="2026-07-04T17:07:06.861" v="8"/>
+        <pc:sldMkLst>
+          <pc:docMk/>
+          <pc:sldMk cId="1712635358" sldId="256"/>
+        </pc:sldMkLst>
+        <pc:spChg chg="del mod">
+          <ac:chgData name="GABRIEL ESTEBAN DE ICAZA DAVILA" userId="1cebe823-2a0b-4e0b-9d02-0c9f2131acb4" providerId="ADAL" clId="{AD3E325F-1260-4BA1-AB31-1F7E6BAADDA3}" dt="2026-07-04T17:07:06.861" v="8"/>
+          <ac:spMkLst>
+            <pc:docMk/>
+            <pc:sldMk cId="1712635358" sldId="256"/>
+            <ac:spMk id="3" creationId="{207F7658-F94B-3B31-FB63-A481D39BB656}"/>
+          </ac:spMkLst>
+        </pc:spChg>
+        <pc:spChg chg="del mod">
+          <ac:chgData name="GABRIEL ESTEBAN DE ICAZA DAVILA" userId="1cebe823-2a0b-4e0b-9d02-0c9f2131acb4" providerId="ADAL" clId="{AD3E325F-1260-4BA1-AB31-1F7E6BAADDA3}" dt="2026-07-04T17:07:06.857" v="6"/>
+          <ac:spMkLst>
+            <pc:docMk/>
+            <pc:sldMk cId="1712635358" sldId="256"/>
+            <ac:spMk id="4" creationId="{0A06A0EA-206E-4235-677A-E344884E6671}"/>
+          </ac:spMkLst>
+        </pc:spChg>
+      </pc:sldChg>
       <pc:sldChg chg="delSp mod">
         <pc:chgData name="GABRIEL ESTEBAN DE ICAZA DAVILA" userId="1cebe823-2a0b-4e0b-9d02-0c9f2131acb4" providerId="ADAL" clId="{AD3E325F-1260-4BA1-AB31-1F7E6BAADDA3}" dt="2026-07-02T23:19:41.068" v="1" actId="478"/>
         <pc:sldMkLst>
           <pc:docMk/>
           <pc:sldMk cId="2266760583" sldId="708"/>
-        </pc:sldMkLst>
-        <pc:graphicFrameChg chg="del">
-          <ac:chgData name="GABRIEL ESTEBAN DE ICAZA DAVILA" userId="1cebe823-2a0b-4e0b-9d02-0c9f2131acb4" providerId="ADAL" clId="{AD3E325F-1260-4BA1-AB31-1F7E6BAADDA3}" dt="2026-07-02T23:19:41.068" v="1" actId="478"/>
-          <ac:graphicFrameMkLst>
-            <pc:docMk/>
-            <pc:sldMk cId="2266760583" sldId="708"/>
-            <ac:graphicFrameMk id="12" creationId="{6D7DACC0-0EF0-0342-1C74-8099DD53CD7E}"/>
-          </ac:graphicFrameMkLst>
-        </pc:graphicFrameChg>
-      </pc:sldChg>
-      <pc:sldChg chg="del">
-        <pc:chgData name="GABRIEL ESTEBAN DE ICAZA DAVILA" userId="1cebe823-2a0b-4e0b-9d02-0c9f2131acb4" providerId="ADAL" clId="{AD3E325F-1260-4BA1-AB31-1F7E6BAADDA3}" dt="2026-07-02T23:13:31.479" v="0" actId="47"/>
-        <pc:sldMkLst>
-          <pc:docMk/>
-          <pc:sldMk cId="512499782" sldId="709"/>
         </pc:sldMkLst>
       </pc:sldChg>
     </pc:docChg>
@@ -242,7 +242,7 @@
           <a:p>
             <a:fld id="{FED258BB-DC48-4212-8D67-1C0CAED33F65}" type="datetimeFigureOut">
               <a:rPr lang="es-MX" smtClean="0"/>
-              <a:t>02/07/2026</a:t>
+              <a:t>04/07/2026</a:t>
             </a:fld>
             <a:endParaRPr lang="es-MX"/>
           </a:p>
@@ -659,7 +659,7 @@
           <a:p>
             <a:fld id="{45FB6773-3841-4524-8CDE-B15D3F531ADD}" type="datetimeFigureOut">
               <a:rPr lang="es-MX" smtClean="0"/>
-              <a:t>02/07/2026</a:t>
+              <a:t>04/07/2026</a:t>
             </a:fld>
             <a:endParaRPr lang="es-MX"/>
           </a:p>
@@ -859,7 +859,7 @@
           <a:p>
             <a:fld id="{45FB6773-3841-4524-8CDE-B15D3F531ADD}" type="datetimeFigureOut">
               <a:rPr lang="es-MX" smtClean="0"/>
-              <a:t>02/07/2026</a:t>
+              <a:t>04/07/2026</a:t>
             </a:fld>
             <a:endParaRPr lang="es-MX"/>
           </a:p>
@@ -1069,7 +1069,7 @@
           <a:p>
             <a:fld id="{45FB6773-3841-4524-8CDE-B15D3F531ADD}" type="datetimeFigureOut">
               <a:rPr lang="es-MX" smtClean="0"/>
-              <a:t>02/07/2026</a:t>
+              <a:t>04/07/2026</a:t>
             </a:fld>
             <a:endParaRPr lang="es-MX"/>
           </a:p>
@@ -1269,7 +1269,7 @@
           <a:p>
             <a:fld id="{45FB6773-3841-4524-8CDE-B15D3F531ADD}" type="datetimeFigureOut">
               <a:rPr lang="es-MX" smtClean="0"/>
-              <a:t>02/07/2026</a:t>
+              <a:t>04/07/2026</a:t>
             </a:fld>
             <a:endParaRPr lang="es-MX"/>
           </a:p>
@@ -1545,7 +1545,7 @@
           <a:p>
             <a:fld id="{45FB6773-3841-4524-8CDE-B15D3F531ADD}" type="datetimeFigureOut">
               <a:rPr lang="es-MX" smtClean="0"/>
-              <a:t>02/07/2026</a:t>
+              <a:t>04/07/2026</a:t>
             </a:fld>
             <a:endParaRPr lang="es-MX"/>
           </a:p>
@@ -1813,7 +1813,7 @@
           <a:p>
             <a:fld id="{45FB6773-3841-4524-8CDE-B15D3F531ADD}" type="datetimeFigureOut">
               <a:rPr lang="es-MX" smtClean="0"/>
-              <a:t>02/07/2026</a:t>
+              <a:t>04/07/2026</a:t>
             </a:fld>
             <a:endParaRPr lang="es-MX"/>
           </a:p>
@@ -2228,7 +2228,7 @@
           <a:p>
             <a:fld id="{45FB6773-3841-4524-8CDE-B15D3F531ADD}" type="datetimeFigureOut">
               <a:rPr lang="es-MX" smtClean="0"/>
-              <a:t>02/07/2026</a:t>
+              <a:t>04/07/2026</a:t>
             </a:fld>
             <a:endParaRPr lang="es-MX"/>
           </a:p>
@@ -2370,7 +2370,7 @@
           <a:p>
             <a:fld id="{45FB6773-3841-4524-8CDE-B15D3F531ADD}" type="datetimeFigureOut">
               <a:rPr lang="es-MX" smtClean="0"/>
-              <a:t>02/07/2026</a:t>
+              <a:t>04/07/2026</a:t>
             </a:fld>
             <a:endParaRPr lang="es-MX"/>
           </a:p>
@@ -2483,7 +2483,7 @@
           <a:p>
             <a:fld id="{45FB6773-3841-4524-8CDE-B15D3F531ADD}" type="datetimeFigureOut">
               <a:rPr lang="es-MX" smtClean="0"/>
-              <a:t>02/07/2026</a:t>
+              <a:t>04/07/2026</a:t>
             </a:fld>
             <a:endParaRPr lang="es-MX"/>
           </a:p>
@@ -2796,7 +2796,7 @@
           <a:p>
             <a:fld id="{45FB6773-3841-4524-8CDE-B15D3F531ADD}" type="datetimeFigureOut">
               <a:rPr lang="es-MX" smtClean="0"/>
-              <a:t>02/07/2026</a:t>
+              <a:t>04/07/2026</a:t>
             </a:fld>
             <a:endParaRPr lang="es-MX"/>
           </a:p>
@@ -3085,7 +3085,7 @@
           <a:p>
             <a:fld id="{45FB6773-3841-4524-8CDE-B15D3F531ADD}" type="datetimeFigureOut">
               <a:rPr lang="es-MX" smtClean="0"/>
-              <a:t>02/07/2026</a:t>
+              <a:t>04/07/2026</a:t>
             </a:fld>
             <a:endParaRPr lang="es-MX"/>
           </a:p>
@@ -3328,7 +3328,7 @@
           <a:p>
             <a:fld id="{45FB6773-3841-4524-8CDE-B15D3F531ADD}" type="datetimeFigureOut">
               <a:rPr lang="es-MX" smtClean="0"/>
-              <a:t>02/07/2026</a:t>
+              <a:t>04/07/2026</a:t>
             </a:fld>
             <a:endParaRPr lang="es-MX"/>
           </a:p>
@@ -3775,56 +3775,6 @@
           </a:prstGeom>
         </p:spPr>
       </p:pic>
-      <p:sp>
-        <p:nvSpPr>
-          <p:cNvPr id="4" name="Rectángulo 3">
-            <a:extLst>
-              <a:ext uri="{FF2B5EF4-FFF2-40B4-BE49-F238E27FC236}">
-                <a16:creationId xmlns:a16="http://schemas.microsoft.com/office/drawing/2014/main" id="{0A06A0EA-206E-4235-677A-E344884E6671}"/>
-              </a:ext>
-            </a:extLst>
-          </p:cNvPr>
-          <p:cNvSpPr/>
-          <p:nvPr/>
-        </p:nvSpPr>
-        <p:spPr>
-          <a:xfrm>
-            <a:off x="167678" y="1993805"/>
-            <a:ext cx="11052771" cy="1107996"/>
-          </a:xfrm>
-          <a:prstGeom prst="rect">
-            <a:avLst/>
-          </a:prstGeom>
-        </p:spPr>
-        <p:txBody>
-          <a:bodyPr wrap="square">
-            <a:spAutoFit/>
-          </a:bodyPr>
-          <a:lstStyle/>
-          <a:p>
-            <a:pPr algn="just"/>
-            <a:r>
-              <a:rPr lang="es-ES" sz="6600" b="1" dirty="0">
-                <a:solidFill>
-                  <a:srgbClr val="FEFAE7"/>
-                </a:solidFill>
-                <a:latin typeface="Roboto" panose="02000000000000000000" pitchFamily="2" charset="0"/>
-                <a:ea typeface="Roboto" panose="02000000000000000000" pitchFamily="2" charset="0"/>
-                <a:cs typeface="Arial" panose="020B0604020202020204" pitchFamily="34" charset="0"/>
-              </a:rPr>
-              <a:t>INFORME DE ACTIVIDADES </a:t>
-            </a:r>
-            <a:endParaRPr lang="es-MX" sz="9600" b="1" dirty="0">
-              <a:solidFill>
-                <a:srgbClr val="FEFAE7"/>
-              </a:solidFill>
-              <a:latin typeface="Roboto" panose="02000000000000000000" pitchFamily="2" charset="0"/>
-              <a:ea typeface="Roboto" panose="02000000000000000000" pitchFamily="2" charset="0"/>
-              <a:cs typeface="Arial" panose="020B0604020202020204" pitchFamily="34" charset="0"/>
-            </a:endParaRPr>
-          </a:p>
-        </p:txBody>
-      </p:sp>
       <p:grpSp>
         <p:nvGrpSpPr>
           <p:cNvPr id="7" name="Grupo 6">
@@ -3944,75 +3894,6 @@
           </a:prstGeom>
         </p:spPr>
       </p:pic>
-      <p:sp>
-        <p:nvSpPr>
-          <p:cNvPr id="3" name="CuadroTexto 2">
-            <a:extLst>
-              <a:ext uri="{FF2B5EF4-FFF2-40B4-BE49-F238E27FC236}">
-                <a16:creationId xmlns:a16="http://schemas.microsoft.com/office/drawing/2014/main" id="{207F7658-F94B-3B31-FB63-A481D39BB656}"/>
-              </a:ext>
-            </a:extLst>
-          </p:cNvPr>
-          <p:cNvSpPr txBox="1"/>
-          <p:nvPr/>
-        </p:nvSpPr>
-        <p:spPr>
-          <a:xfrm>
-            <a:off x="167677" y="3083512"/>
-            <a:ext cx="6218902" cy="923330"/>
-          </a:xfrm>
-          <a:prstGeom prst="rect">
-            <a:avLst/>
-          </a:prstGeom>
-          <a:noFill/>
-        </p:spPr>
-        <p:txBody>
-          <a:bodyPr wrap="square">
-            <a:spAutoFit/>
-          </a:bodyPr>
-          <a:lstStyle/>
-          <a:p>
-            <a:pPr marL="0" marR="0" lvl="0" indent="0" algn="just" rtl="0">
-              <a:lnSpc>
-                <a:spcPct val="100000"/>
-              </a:lnSpc>
-              <a:spcBef>
-                <a:spcPts val="0"/>
-              </a:spcBef>
-              <a:spcAft>
-                <a:spcPts val="0"/>
-              </a:spcAft>
-              <a:buClr>
-                <a:srgbClr val="000000"/>
-              </a:buClr>
-              <a:buSzPts val="1600"/>
-              <a:buFont typeface="Arial"/>
-              <a:buNone/>
-            </a:pPr>
-            <a:r>
-              <a:rPr lang="es-ES" sz="1800" b="1" i="0" u="none" strike="noStrike" cap="none" dirty="0">
-                <a:solidFill>
-                  <a:srgbClr val="FEFAE7"/>
-                </a:solidFill>
-                <a:latin typeface="Roboto"/>
-                <a:ea typeface="Roboto"/>
-                <a:cs typeface="Roboto"/>
-                <a:sym typeface="Roboto"/>
-              </a:rPr>
-              <a:t>CONSTRUCCIÓN DE LA LÍNEA 4 TLALPAN – COYOACÁN, DEL SISTEMA DE TRANSPORTE PÚBLICO CABLEBÚS DE LA CIUDAD DE MÉXICO</a:t>
-            </a:r>
-            <a:endParaRPr lang="es-ES" sz="3200" b="1" i="0" u="none" strike="noStrike" cap="none" dirty="0">
-              <a:solidFill>
-                <a:srgbClr val="FEFAE7"/>
-              </a:solidFill>
-              <a:latin typeface="Roboto"/>
-              <a:ea typeface="Roboto"/>
-              <a:cs typeface="Roboto"/>
-              <a:sym typeface="Roboto"/>
-            </a:endParaRPr>
-          </a:p>
-        </p:txBody>
-      </p:sp>
       <p:pic>
         <p:nvPicPr>
           <p:cNvPr id="10" name="Google Shape;473;p1" descr="Dirac">
